--- a/PS9NavigationSlides.pptx
+++ b/PS9NavigationSlides.pptx
@@ -2559,7 +2559,7 @@
                 <a:ea typeface="Calibri" pitchFamily="34" charset="-122"/>
                 <a:cs typeface="Calibri" pitchFamily="34" charset="-120"/>
               </a:rPr>
-              <a:t>Pearson BTEC Level 1 Introductory in Sport</a:t>
+              <a:t>Pearson BTEC Level 1 Introductory in Public Services</a:t>
             </a:r>
             <a:endParaRPr lang="en-US" sz="1300" dirty="0"/>
           </a:p>
